--- a/dataset/guides_final/HW/manual/IT-HW-001-M_업무 PC 기본 장애 처리 매뉴얼.pptx
+++ b/dataset/guides_final/HW/manual/IT-HW-001-M_업무 PC 기본 장애 처리 매뉴얼.pptx
@@ -63394,7 +63394,7 @@
                 <a:ea typeface="Malgun Gothic"/>
                 <a:cs typeface="Malgun Gothic"/>
               </a:rPr>
-              <a:t>티켓: 담당자 조치가 필요한 건. 담당팀에 배정하고 상태를 RDY → IP → FIN → CLS 으로 관리한다.</a:t>
+              <a:t>티켓: 담당자 조치가 필요한 건. 담당팀에 배정하고 상태를 RDY → WIP → FIN → CLS 으로 관리한다.</a:t>
             </a:r>
           </a:p>
         </p:txBody>

--- a/dataset/guides_final/HW/manual/IT-HW-001-M_업무 PC 기본 장애 처리 매뉴얼.pptx
+++ b/dataset/guides_final/HW/manual/IT-HW-001-M_업무 PC 기본 장애 처리 매뉴얼.pptx
@@ -3268,7 +3268,7 @@
                 <a:ea typeface="Malgun Gothic"/>
                 <a:cs typeface="Malgun Gothic"/>
               </a:rPr>
-              <a:t>한화시스템 ICT IT 담당자 매뉴얼 · HW·업무 PC</a:t>
+              <a:t>가상 ICT 기업 IT 담당자 매뉴얼 · HW·업무 PC</a:t>
             </a:r>
           </a:p>
         </p:txBody>
@@ -3547,7 +3547,7 @@
                 <a:ea typeface="Malgun Gothic"/>
                 <a:cs typeface="Malgun Gothic"/>
               </a:rPr>
-              <a:t>© HANWHA SYSTEMS ICT · IT-HW-001-M · 사내 제한</a:t>
+              <a:t>© 가상 ICT 기업 · IT-HW-001-M · 사내 제한</a:t>
             </a:r>
           </a:p>
         </p:txBody>
@@ -4673,7 +4673,7 @@
                 <a:ea typeface="Malgun Gothic"/>
                 <a:cs typeface="Malgun Gothic"/>
               </a:rPr>
-              <a:t>© HANWHA SYSTEMS ICT · IT-HW-001-M · 사내 제한</a:t>
+              <a:t>© 가상 ICT 기업 · IT-HW-001-M · 사내 제한</a:t>
             </a:r>
           </a:p>
         </p:txBody>
@@ -6066,7 +6066,7 @@
                 <a:ea typeface="Malgun Gothic"/>
                 <a:cs typeface="Malgun Gothic"/>
               </a:rPr>
-              <a:t>© HANWHA SYSTEMS ICT · IT-HW-001-M · 사내 제한</a:t>
+              <a:t>© 가상 ICT 기업 · IT-HW-001-M · 사내 제한</a:t>
             </a:r>
           </a:p>
         </p:txBody>
@@ -7171,7 +7171,7 @@
                 <a:ea typeface="Malgun Gothic"/>
                 <a:cs typeface="Malgun Gothic"/>
               </a:rPr>
-              <a:t>© HANWHA SYSTEMS ICT · IT-HW-001-M · 사내 제한</a:t>
+              <a:t>© 가상 ICT 기업 · IT-HW-001-M · 사내 제한</a:t>
             </a:r>
           </a:p>
         </p:txBody>
@@ -8297,7 +8297,7 @@
                 <a:ea typeface="Malgun Gothic"/>
                 <a:cs typeface="Malgun Gothic"/>
               </a:rPr>
-              <a:t>© HANWHA SYSTEMS ICT · IT-HW-001-M · 사내 제한</a:t>
+              <a:t>© 가상 ICT 기업 · IT-HW-001-M · 사내 제한</a:t>
             </a:r>
           </a:p>
         </p:txBody>
@@ -9690,7 +9690,7 @@
                 <a:ea typeface="Malgun Gothic"/>
                 <a:cs typeface="Malgun Gothic"/>
               </a:rPr>
-              <a:t>© HANWHA SYSTEMS ICT · IT-HW-001-M · 사내 제한</a:t>
+              <a:t>© 가상 ICT 기업 · IT-HW-001-M · 사내 제한</a:t>
             </a:r>
           </a:p>
         </p:txBody>
@@ -10795,7 +10795,7 @@
                 <a:ea typeface="Malgun Gothic"/>
                 <a:cs typeface="Malgun Gothic"/>
               </a:rPr>
-              <a:t>© HANWHA SYSTEMS ICT · IT-HW-001-M · 사내 제한</a:t>
+              <a:t>© 가상 ICT 기업 · IT-HW-001-M · 사내 제한</a:t>
             </a:r>
           </a:p>
         </p:txBody>
@@ -11921,7 +11921,7 @@
                 <a:ea typeface="Malgun Gothic"/>
                 <a:cs typeface="Malgun Gothic"/>
               </a:rPr>
-              <a:t>© HANWHA SYSTEMS ICT · IT-HW-001-M · 사내 제한</a:t>
+              <a:t>© 가상 ICT 기업 · IT-HW-001-M · 사내 제한</a:t>
             </a:r>
           </a:p>
         </p:txBody>
@@ -13432,7 +13432,7 @@
                 <a:ea typeface="Malgun Gothic"/>
                 <a:cs typeface="Malgun Gothic"/>
               </a:rPr>
-              <a:t>© HANWHA SYSTEMS ICT · IT-HW-001-M · 사내 제한</a:t>
+              <a:t>© 가상 ICT 기업 · IT-HW-001-M · 사내 제한</a:t>
             </a:r>
           </a:p>
         </p:txBody>
@@ -14561,7 +14561,7 @@
                 <a:ea typeface="Malgun Gothic"/>
                 <a:cs typeface="Malgun Gothic"/>
               </a:rPr>
-              <a:t>© HANWHA SYSTEMS ICT · IT-HW-001-M · 사내 제한</a:t>
+              <a:t>© 가상 ICT 기업 · IT-HW-001-M · 사내 제한</a:t>
             </a:r>
           </a:p>
         </p:txBody>
@@ -15687,7 +15687,7 @@
                 <a:ea typeface="Malgun Gothic"/>
                 <a:cs typeface="Malgun Gothic"/>
               </a:rPr>
-              <a:t>© HANWHA SYSTEMS ICT · IT-HW-001-M · 사내 제한</a:t>
+              <a:t>© 가상 ICT 기업 · IT-HW-001-M · 사내 제한</a:t>
             </a:r>
           </a:p>
         </p:txBody>
@@ -17330,7 +17330,7 @@
                 <a:ea typeface="Malgun Gothic"/>
                 <a:cs typeface="Malgun Gothic"/>
               </a:rPr>
-              <a:t>© HANWHA SYSTEMS ICT · IT-HW-001-M · 사내 제한</a:t>
+              <a:t>© 가상 ICT 기업 · IT-HW-001-M · 사내 제한</a:t>
             </a:r>
           </a:p>
         </p:txBody>
@@ -18699,7 +18699,7 @@
                 <a:ea typeface="Malgun Gothic"/>
                 <a:cs typeface="Malgun Gothic"/>
               </a:rPr>
-              <a:t>© HANWHA SYSTEMS ICT · IT-HW-001-M · 사내 제한</a:t>
+              <a:t>© 가상 ICT 기업 · IT-HW-001-M · 사내 제한</a:t>
             </a:r>
           </a:p>
         </p:txBody>
@@ -19616,7 +19616,7 @@
                 <a:ea typeface="Malgun Gothic"/>
                 <a:cs typeface="Malgun Gothic"/>
               </a:rPr>
-              <a:t>© HANWHA SYSTEMS ICT · IT-HW-001-M · 사내 제한</a:t>
+              <a:t>© 가상 ICT 기업 · IT-HW-001-M · 사내 제한</a:t>
             </a:r>
           </a:p>
         </p:txBody>
@@ -20742,7 +20742,7 @@
                 <a:ea typeface="Malgun Gothic"/>
                 <a:cs typeface="Malgun Gothic"/>
               </a:rPr>
-              <a:t>© HANWHA SYSTEMS ICT · IT-HW-001-M · 사내 제한</a:t>
+              <a:t>© 가상 ICT 기업 · IT-HW-001-M · 사내 제한</a:t>
             </a:r>
           </a:p>
         </p:txBody>
@@ -22111,7 +22111,7 @@
                 <a:ea typeface="Malgun Gothic"/>
                 <a:cs typeface="Malgun Gothic"/>
               </a:rPr>
-              <a:t>© HANWHA SYSTEMS ICT · IT-HW-001-M · 사내 제한</a:t>
+              <a:t>© 가상 ICT 기업 · IT-HW-001-M · 사내 제한</a:t>
             </a:r>
           </a:p>
         </p:txBody>
@@ -23028,7 +23028,7 @@
                 <a:ea typeface="Malgun Gothic"/>
                 <a:cs typeface="Malgun Gothic"/>
               </a:rPr>
-              <a:t>© HANWHA SYSTEMS ICT · IT-HW-001-M · 사내 제한</a:t>
+              <a:t>© 가상 ICT 기업 · IT-HW-001-M · 사내 제한</a:t>
             </a:r>
           </a:p>
         </p:txBody>
@@ -24154,7 +24154,7 @@
                 <a:ea typeface="Malgun Gothic"/>
                 <a:cs typeface="Malgun Gothic"/>
               </a:rPr>
-              <a:t>© HANWHA SYSTEMS ICT · IT-HW-001-M · 사내 제한</a:t>
+              <a:t>© 가상 ICT 기업 · IT-HW-001-M · 사내 제한</a:t>
             </a:r>
           </a:p>
         </p:txBody>
@@ -25523,7 +25523,7 @@
                 <a:ea typeface="Malgun Gothic"/>
                 <a:cs typeface="Malgun Gothic"/>
               </a:rPr>
-              <a:t>© HANWHA SYSTEMS ICT · IT-HW-001-M · 사내 제한</a:t>
+              <a:t>© 가상 ICT 기업 · IT-HW-001-M · 사내 제한</a:t>
             </a:r>
           </a:p>
         </p:txBody>
@@ -26440,7 +26440,7 @@
                 <a:ea typeface="Malgun Gothic"/>
                 <a:cs typeface="Malgun Gothic"/>
               </a:rPr>
-              <a:t>© HANWHA SYSTEMS ICT · IT-HW-001-M · 사내 제한</a:t>
+              <a:t>© 가상 ICT 기업 · IT-HW-001-M · 사내 제한</a:t>
             </a:r>
           </a:p>
         </p:txBody>
@@ -27566,7 +27566,7 @@
                 <a:ea typeface="Malgun Gothic"/>
                 <a:cs typeface="Malgun Gothic"/>
               </a:rPr>
-              <a:t>© HANWHA SYSTEMS ICT · IT-HW-001-M · 사내 제한</a:t>
+              <a:t>© 가상 ICT 기업 · IT-HW-001-M · 사내 제한</a:t>
             </a:r>
           </a:p>
         </p:txBody>
@@ -28841,7 +28841,7 @@
                 <a:ea typeface="Malgun Gothic"/>
                 <a:cs typeface="Malgun Gothic"/>
               </a:rPr>
-              <a:t>© HANWHA SYSTEMS ICT · IT-HW-001-M · 사내 제한</a:t>
+              <a:t>© 가상 ICT 기업 · IT-HW-001-M · 사내 제한</a:t>
             </a:r>
           </a:p>
         </p:txBody>
@@ -29987,7 +29987,7 @@
                 <a:ea typeface="Malgun Gothic"/>
                 <a:cs typeface="Malgun Gothic"/>
               </a:rPr>
-              <a:t>© HANWHA SYSTEMS ICT · IT-HW-001-M · 사내 제한</a:t>
+              <a:t>© 가상 ICT 기업 · IT-HW-001-M · 사내 제한</a:t>
             </a:r>
           </a:p>
         </p:txBody>
@@ -30904,7 +30904,7 @@
                 <a:ea typeface="Malgun Gothic"/>
                 <a:cs typeface="Malgun Gothic"/>
               </a:rPr>
-              <a:t>© HANWHA SYSTEMS ICT · IT-HW-001-M · 사내 제한</a:t>
+              <a:t>© 가상 ICT 기업 · IT-HW-001-M · 사내 제한</a:t>
             </a:r>
           </a:p>
         </p:txBody>
@@ -32030,7 +32030,7 @@
                 <a:ea typeface="Malgun Gothic"/>
                 <a:cs typeface="Malgun Gothic"/>
               </a:rPr>
-              <a:t>© HANWHA SYSTEMS ICT · IT-HW-001-M · 사내 제한</a:t>
+              <a:t>© 가상 ICT 기업 · IT-HW-001-M · 사내 제한</a:t>
             </a:r>
           </a:p>
         </p:txBody>
@@ -33399,7 +33399,7 @@
                 <a:ea typeface="Malgun Gothic"/>
                 <a:cs typeface="Malgun Gothic"/>
               </a:rPr>
-              <a:t>© HANWHA SYSTEMS ICT · IT-HW-001-M · 사내 제한</a:t>
+              <a:t>© 가상 ICT 기업 · IT-HW-001-M · 사내 제한</a:t>
             </a:r>
           </a:p>
         </p:txBody>
@@ -34504,7 +34504,7 @@
                 <a:ea typeface="Malgun Gothic"/>
                 <a:cs typeface="Malgun Gothic"/>
               </a:rPr>
-              <a:t>© HANWHA SYSTEMS ICT · IT-HW-001-M · 사내 제한</a:t>
+              <a:t>© 가상 ICT 기업 · IT-HW-001-M · 사내 제한</a:t>
             </a:r>
           </a:p>
         </p:txBody>
@@ -35630,7 +35630,7 @@
                 <a:ea typeface="Malgun Gothic"/>
                 <a:cs typeface="Malgun Gothic"/>
               </a:rPr>
-              <a:t>© HANWHA SYSTEMS ICT · IT-HW-001-M · 사내 제한</a:t>
+              <a:t>© 가상 ICT 기업 · IT-HW-001-M · 사내 제한</a:t>
             </a:r>
           </a:p>
         </p:txBody>
@@ -36905,7 +36905,7 @@
                 <a:ea typeface="Malgun Gothic"/>
                 <a:cs typeface="Malgun Gothic"/>
               </a:rPr>
-              <a:t>© HANWHA SYSTEMS ICT · IT-HW-001-M · 사내 제한</a:t>
+              <a:t>© 가상 ICT 기업 · IT-HW-001-M · 사내 제한</a:t>
             </a:r>
           </a:p>
         </p:txBody>
@@ -37822,7 +37822,7 @@
                 <a:ea typeface="Malgun Gothic"/>
                 <a:cs typeface="Malgun Gothic"/>
               </a:rPr>
-              <a:t>© HANWHA SYSTEMS ICT · IT-HW-001-M · 사내 제한</a:t>
+              <a:t>© 가상 ICT 기업 · IT-HW-001-M · 사내 제한</a:t>
             </a:r>
           </a:p>
         </p:txBody>
@@ -38948,7 +38948,7 @@
                 <a:ea typeface="Malgun Gothic"/>
                 <a:cs typeface="Malgun Gothic"/>
               </a:rPr>
-              <a:t>© HANWHA SYSTEMS ICT · IT-HW-001-M · 사내 제한</a:t>
+              <a:t>© 가상 ICT 기업 · IT-HW-001-M · 사내 제한</a:t>
             </a:r>
           </a:p>
         </p:txBody>
@@ -40317,7 +40317,7 @@
                 <a:ea typeface="Malgun Gothic"/>
                 <a:cs typeface="Malgun Gothic"/>
               </a:rPr>
-              <a:t>© HANWHA SYSTEMS ICT · IT-HW-001-M · 사내 제한</a:t>
+              <a:t>© 가상 ICT 기업 · IT-HW-001-M · 사내 제한</a:t>
             </a:r>
           </a:p>
         </p:txBody>
@@ -41234,7 +41234,7 @@
                 <a:ea typeface="Malgun Gothic"/>
                 <a:cs typeface="Malgun Gothic"/>
               </a:rPr>
-              <a:t>© HANWHA SYSTEMS ICT · IT-HW-001-M · 사내 제한</a:t>
+              <a:t>© 가상 ICT 기업 · IT-HW-001-M · 사내 제한</a:t>
             </a:r>
           </a:p>
         </p:txBody>
@@ -41482,7 +41482,7 @@
                 <a:ea typeface="Malgun Gothic"/>
                 <a:cs typeface="Malgun Gothic"/>
               </a:rPr>
-              <a:t>© HANWHA SYSTEMS ICT · IT-HW-001-M · 사내 제한</a:t>
+              <a:t>© 가상 ICT 기업 · IT-HW-001-M · 사내 제한</a:t>
             </a:r>
           </a:p>
         </p:txBody>
@@ -42608,7 +42608,7 @@
                 <a:ea typeface="Malgun Gothic"/>
                 <a:cs typeface="Malgun Gothic"/>
               </a:rPr>
-              <a:t>© HANWHA SYSTEMS ICT · IT-HW-001-M · 사내 제한</a:t>
+              <a:t>© 가상 ICT 기업 · IT-HW-001-M · 사내 제한</a:t>
             </a:r>
           </a:p>
         </p:txBody>
@@ -43883,7 +43883,7 @@
                 <a:ea typeface="Malgun Gothic"/>
                 <a:cs typeface="Malgun Gothic"/>
               </a:rPr>
-              <a:t>© HANWHA SYSTEMS ICT · IT-HW-001-M · 사내 제한</a:t>
+              <a:t>© 가상 ICT 기업 · IT-HW-001-M · 사내 제한</a:t>
             </a:r>
           </a:p>
         </p:txBody>
@@ -44800,7 +44800,7 @@
                 <a:ea typeface="Malgun Gothic"/>
                 <a:cs typeface="Malgun Gothic"/>
               </a:rPr>
-              <a:t>© HANWHA SYSTEMS ICT · IT-HW-001-M · 사내 제한</a:t>
+              <a:t>© 가상 ICT 기업 · IT-HW-001-M · 사내 제한</a:t>
             </a:r>
           </a:p>
         </p:txBody>
@@ -45926,7 +45926,7 @@
                 <a:ea typeface="Malgun Gothic"/>
                 <a:cs typeface="Malgun Gothic"/>
               </a:rPr>
-              <a:t>© HANWHA SYSTEMS ICT · IT-HW-001-M · 사내 제한</a:t>
+              <a:t>© 가상 ICT 기업 · IT-HW-001-M · 사내 제한</a:t>
             </a:r>
           </a:p>
         </p:txBody>
@@ -47319,7 +47319,7 @@
                 <a:ea typeface="Malgun Gothic"/>
                 <a:cs typeface="Malgun Gothic"/>
               </a:rPr>
-              <a:t>© HANWHA SYSTEMS ICT · IT-HW-001-M · 사내 제한</a:t>
+              <a:t>© 가상 ICT 기업 · IT-HW-001-M · 사내 제한</a:t>
             </a:r>
           </a:p>
         </p:txBody>
@@ -48236,7 +48236,7 @@
                 <a:ea typeface="Malgun Gothic"/>
                 <a:cs typeface="Malgun Gothic"/>
               </a:rPr>
-              <a:t>© HANWHA SYSTEMS ICT · IT-HW-001-M · 사내 제한</a:t>
+              <a:t>© 가상 ICT 기업 · IT-HW-001-M · 사내 제한</a:t>
             </a:r>
           </a:p>
         </p:txBody>
@@ -49362,7 +49362,7 @@
                 <a:ea typeface="Malgun Gothic"/>
                 <a:cs typeface="Malgun Gothic"/>
               </a:rPr>
-              <a:t>© HANWHA SYSTEMS ICT · IT-HW-001-M · 사내 제한</a:t>
+              <a:t>© 가상 ICT 기업 · IT-HW-001-M · 사내 제한</a:t>
             </a:r>
           </a:p>
         </p:txBody>
@@ -50685,7 +50685,7 @@
                 <a:ea typeface="Malgun Gothic"/>
                 <a:cs typeface="Malgun Gothic"/>
               </a:rPr>
-              <a:t>© HANWHA SYSTEMS ICT · IT-HW-001-M · 사내 제한</a:t>
+              <a:t>© 가상 ICT 기업 · IT-HW-001-M · 사내 제한</a:t>
             </a:r>
           </a:p>
         </p:txBody>
@@ -51602,7 +51602,7 @@
                 <a:ea typeface="Malgun Gothic"/>
                 <a:cs typeface="Malgun Gothic"/>
               </a:rPr>
-              <a:t>© HANWHA SYSTEMS ICT · IT-HW-001-M · 사내 제한</a:t>
+              <a:t>© 가상 ICT 기업 · IT-HW-001-M · 사내 제한</a:t>
             </a:r>
           </a:p>
         </p:txBody>
@@ -51850,7 +51850,7 @@
                 <a:ea typeface="Malgun Gothic"/>
                 <a:cs typeface="Malgun Gothic"/>
               </a:rPr>
-              <a:t>© HANWHA SYSTEMS ICT · IT-HW-001-M · 사내 제한</a:t>
+              <a:t>© 가상 ICT 기업 · IT-HW-001-M · 사내 제한</a:t>
             </a:r>
           </a:p>
         </p:txBody>
@@ -53020,7 +53020,7 @@
                 <a:ea typeface="Malgun Gothic"/>
                 <a:cs typeface="Malgun Gothic"/>
               </a:rPr>
-              <a:t>© HANWHA SYSTEMS ICT · IT-HW-001-M · 사내 제한</a:t>
+              <a:t>© 가상 ICT 기업 · IT-HW-001-M · 사내 제한</a:t>
             </a:r>
           </a:p>
         </p:txBody>
@@ -53703,7 +53703,7 @@
                 <a:ea typeface="Malgun Gothic"/>
                 <a:cs typeface="Malgun Gothic"/>
               </a:rPr>
-              <a:t>© HANWHA SYSTEMS ICT · IT-HW-001-M · 사내 제한</a:t>
+              <a:t>© 가상 ICT 기업 · IT-HW-001-M · 사내 제한</a:t>
             </a:r>
           </a:p>
         </p:txBody>
@@ -53951,7 +53951,7 @@
                 <a:ea typeface="Malgun Gothic"/>
                 <a:cs typeface="Malgun Gothic"/>
               </a:rPr>
-              <a:t>© HANWHA SYSTEMS ICT · IT-HW-001-M · 사내 제한</a:t>
+              <a:t>© 가상 ICT 기업 · IT-HW-001-M · 사내 제한</a:t>
             </a:r>
           </a:p>
         </p:txBody>
@@ -54979,7 +54979,7 @@
                 <a:ea typeface="Malgun Gothic"/>
                 <a:cs typeface="Malgun Gothic"/>
               </a:rPr>
-              <a:t>© HANWHA SYSTEMS ICT · IT-HW-001-M · 사내 제한</a:t>
+              <a:t>© 가상 ICT 기업 · IT-HW-001-M · 사내 제한</a:t>
             </a:r>
           </a:p>
         </p:txBody>
@@ -55227,7 +55227,7 @@
                 <a:ea typeface="Malgun Gothic"/>
                 <a:cs typeface="Malgun Gothic"/>
               </a:rPr>
-              <a:t>© HANWHA SYSTEMS ICT · IT-HW-001-M · 사내 제한</a:t>
+              <a:t>© 가상 ICT 기업 · IT-HW-001-M · 사내 제한</a:t>
             </a:r>
           </a:p>
         </p:txBody>
@@ -55919,7 +55919,7 @@
                 <a:ea typeface="Malgun Gothic"/>
                 <a:cs typeface="Malgun Gothic"/>
               </a:rPr>
-              <a:t>© HANWHA SYSTEMS ICT · IT-HW-001-M · 사내 제한</a:t>
+              <a:t>© 가상 ICT 기업 · IT-HW-001-M · 사내 제한</a:t>
             </a:r>
           </a:p>
         </p:txBody>
@@ -56896,7 +56896,7 @@
                 <a:ea typeface="Malgun Gothic"/>
                 <a:cs typeface="Malgun Gothic"/>
               </a:rPr>
-              <a:t>© HANWHA SYSTEMS ICT · IT-HW-001-M · 사내 제한</a:t>
+              <a:t>© 가상 ICT 기업 · IT-HW-001-M · 사내 제한</a:t>
             </a:r>
           </a:p>
         </p:txBody>
@@ -57144,7 +57144,7 @@
                 <a:ea typeface="Malgun Gothic"/>
                 <a:cs typeface="Malgun Gothic"/>
               </a:rPr>
-              <a:t>© HANWHA SYSTEMS ICT · IT-HW-001-M · 사내 제한</a:t>
+              <a:t>© 가상 ICT 기업 · IT-HW-001-M · 사내 제한</a:t>
             </a:r>
           </a:p>
         </p:txBody>
@@ -62923,7 +62923,7 @@
                 <a:ea typeface="Malgun Gothic"/>
                 <a:cs typeface="Malgun Gothic"/>
               </a:rPr>
-              <a:t>© HANWHA SYSTEMS ICT · IT-HW-001-M · 사내 제한</a:t>
+              <a:t>© 가상 ICT 기업 · IT-HW-001-M · 사내 제한</a:t>
             </a:r>
           </a:p>
         </p:txBody>
@@ -63864,7 +63864,7 @@
                 <a:ea typeface="Malgun Gothic"/>
                 <a:cs typeface="Malgun Gothic"/>
               </a:rPr>
-              <a:t>© HANWHA SYSTEMS ICT · IT-HW-001-M · 사내 제한</a:t>
+              <a:t>© 가상 ICT 기업 · IT-HW-001-M · 사내 제한</a:t>
             </a:r>
           </a:p>
         </p:txBody>
@@ -64112,7 +64112,7 @@
                 <a:ea typeface="Malgun Gothic"/>
                 <a:cs typeface="Malgun Gothic"/>
               </a:rPr>
-              <a:t>© HANWHA SYSTEMS ICT · IT-HW-001-M · 사내 제한</a:t>
+              <a:t>© 가상 ICT 기업 · IT-HW-001-M · 사내 제한</a:t>
             </a:r>
           </a:p>
         </p:txBody>
